--- a/docs/BigBlueBam-Overview.pptx
+++ b/docs/BigBlueBam-Overview.pptx
@@ -5,47 +5,47 @@
     <p:sldMasterId id="2147483648" r:id="rId1"/>
   </p:sldMasterIdLst>
   <p:sldIdLst>
-    <p:sldId id="256" r:id="rId7"/>
-    <p:sldId id="257" r:id="rId8"/>
-    <p:sldId id="258" r:id="rId9"/>
-    <p:sldId id="259" r:id="rId10"/>
-    <p:sldId id="260" r:id="rId11"/>
-    <p:sldId id="261" r:id="rId12"/>
-    <p:sldId id="262" r:id="rId13"/>
-    <p:sldId id="263" r:id="rId14"/>
-    <p:sldId id="264" r:id="rId15"/>
-    <p:sldId id="265" r:id="rId16"/>
-    <p:sldId id="266" r:id="rId17"/>
-    <p:sldId id="267" r:id="rId18"/>
-    <p:sldId id="268" r:id="rId19"/>
-    <p:sldId id="269" r:id="rId20"/>
-    <p:sldId id="270" r:id="rId21"/>
-    <p:sldId id="271" r:id="rId22"/>
-    <p:sldId id="272" r:id="rId23"/>
-    <p:sldId id="273" r:id="rId24"/>
-    <p:sldId id="274" r:id="rId25"/>
-    <p:sldId id="275" r:id="rId26"/>
-    <p:sldId id="276" r:id="rId27"/>
-    <p:sldId id="277" r:id="rId28"/>
-    <p:sldId id="278" r:id="rId29"/>
-    <p:sldId id="279" r:id="rId30"/>
-    <p:sldId id="280" r:id="rId31"/>
-    <p:sldId id="281" r:id="rId32"/>
-    <p:sldId id="282" r:id="rId33"/>
-    <p:sldId id="283" r:id="rId34"/>
-    <p:sldId id="284" r:id="rId35"/>
-    <p:sldId id="285" r:id="rId36"/>
-    <p:sldId id="286" r:id="rId37"/>
-    <p:sldId id="287" r:id="rId38"/>
-    <p:sldId id="288" r:id="rId39"/>
-    <p:sldId id="289" r:id="rId40"/>
-    <p:sldId id="290" r:id="rId41"/>
-    <p:sldId id="291" r:id="rId42"/>
-    <p:sldId id="292" r:id="rId43"/>
-    <p:sldId id="293" r:id="rId44"/>
-    <p:sldId id="294" r:id="rId45"/>
+    <p:sldId id="256" r:id="rId2"/>
+    <p:sldId id="257" r:id="rId3"/>
+    <p:sldId id="258" r:id="rId4"/>
+    <p:sldId id="259" r:id="rId5"/>
+    <p:sldId id="260" r:id="rId6"/>
+    <p:sldId id="261" r:id="rId7"/>
+    <p:sldId id="262" r:id="rId8"/>
+    <p:sldId id="263" r:id="rId9"/>
+    <p:sldId id="264" r:id="rId10"/>
+    <p:sldId id="265" r:id="rId11"/>
+    <p:sldId id="266" r:id="rId12"/>
+    <p:sldId id="267" r:id="rId13"/>
+    <p:sldId id="268" r:id="rId14"/>
+    <p:sldId id="269" r:id="rId15"/>
+    <p:sldId id="270" r:id="rId16"/>
+    <p:sldId id="271" r:id="rId17"/>
+    <p:sldId id="272" r:id="rId18"/>
+    <p:sldId id="273" r:id="rId19"/>
+    <p:sldId id="274" r:id="rId20"/>
+    <p:sldId id="275" r:id="rId21"/>
+    <p:sldId id="276" r:id="rId22"/>
+    <p:sldId id="277" r:id="rId23"/>
+    <p:sldId id="278" r:id="rId24"/>
+    <p:sldId id="279" r:id="rId25"/>
+    <p:sldId id="280" r:id="rId26"/>
+    <p:sldId id="281" r:id="rId27"/>
+    <p:sldId id="282" r:id="rId28"/>
+    <p:sldId id="283" r:id="rId29"/>
+    <p:sldId id="284" r:id="rId30"/>
+    <p:sldId id="285" r:id="rId31"/>
+    <p:sldId id="286" r:id="rId32"/>
+    <p:sldId id="287" r:id="rId33"/>
+    <p:sldId id="288" r:id="rId34"/>
+    <p:sldId id="289" r:id="rId35"/>
+    <p:sldId id="290" r:id="rId36"/>
+    <p:sldId id="291" r:id="rId37"/>
+    <p:sldId id="292" r:id="rId38"/>
+    <p:sldId id="293" r:id="rId39"/>
+    <p:sldId id="294" r:id="rId40"/>
   </p:sldIdLst>
-  <p:sldSz cx="12191695" cy="6858000" type="screen4x3"/>
+  <p:sldSz cx="12192000" cy="6858000"/>
   <p:notesSz cx="6858000" cy="9144000"/>
   <p:defaultTextStyle>
     <a:defPPr>
@@ -142,6 +142,22 @@
       </a:defRPr>
     </a:lvl9pPr>
   </p:defaultTextStyle>
+  <p:extLst>
+    <p:ext uri="{EFAFB233-063F-42B5-8137-9DF3F51BA10A}">
+      <p15:sldGuideLst xmlns:p15="http://schemas.microsoft.com/office/powerpoint/2012/main">
+        <p15:guide id="1" orient="horz" pos="2160">
+          <p15:clr>
+            <a:srgbClr val="A4A3A4"/>
+          </p15:clr>
+        </p15:guide>
+        <p15:guide id="2" pos="2880">
+          <p15:clr>
+            <a:srgbClr val="A4A3A4"/>
+          </p15:clr>
+        </p15:guide>
+      </p15:sldGuideLst>
+    </p:ext>
+  </p:extLst>
 </p:presentation>
 </file>
 
@@ -183,10 +199,9 @@
           <a:lstStyle/>
           <a:p>
             <a:r>
-              <a:rPr lang="en-US" smtClean="0"/>
+              <a:rPr lang="en-US"/>
               <a:t>Click to edit Master title style</a:t>
             </a:r>
-            <a:endParaRPr lang="en-US"/>
           </a:p>
         </p:txBody>
       </p:sp>
@@ -302,10 +317,9 @@
           </a:lstStyle>
           <a:p>
             <a:r>
-              <a:rPr lang="en-US" smtClean="0"/>
+              <a:rPr lang="en-US"/>
               <a:t>Click to edit Master subtitle style</a:t>
             </a:r>
-            <a:endParaRPr lang="en-US"/>
           </a:p>
         </p:txBody>
       </p:sp>
@@ -326,7 +340,7 @@
           <a:p>
             <a:fld id="{5BCAD085-E8A6-8845-BD4E-CB4CCA059FC4}" type="datetimeFigureOut">
               <a:rPr lang="en-US" smtClean="0"/>
-              <a:t>1/27/13</a:t>
+              <a:t>4/7/2026</a:t>
             </a:fld>
             <a:endParaRPr lang="en-US"/>
           </a:p>
@@ -420,10 +434,9 @@
           <a:lstStyle/>
           <a:p>
             <a:r>
-              <a:rPr lang="en-US" smtClean="0"/>
+              <a:rPr lang="en-US"/>
               <a:t>Click to edit Master title style</a:t>
             </a:r>
-            <a:endParaRPr lang="en-US"/>
           </a:p>
         </p:txBody>
       </p:sp>
@@ -444,38 +457,37 @@
           <a:p>
             <a:pPr lvl="0"/>
             <a:r>
-              <a:rPr lang="en-US" smtClean="0"/>
+              <a:rPr lang="en-US"/>
               <a:t>Click to edit Master text styles</a:t>
             </a:r>
           </a:p>
           <a:p>
             <a:pPr lvl="1"/>
             <a:r>
-              <a:rPr lang="en-US" smtClean="0"/>
+              <a:rPr lang="en-US"/>
               <a:t>Second level</a:t>
             </a:r>
           </a:p>
           <a:p>
             <a:pPr lvl="2"/>
             <a:r>
-              <a:rPr lang="en-US" smtClean="0"/>
+              <a:rPr lang="en-US"/>
               <a:t>Third level</a:t>
             </a:r>
           </a:p>
           <a:p>
             <a:pPr lvl="3"/>
             <a:r>
-              <a:rPr lang="en-US" smtClean="0"/>
+              <a:rPr lang="en-US"/>
               <a:t>Fourth level</a:t>
             </a:r>
           </a:p>
           <a:p>
             <a:pPr lvl="4"/>
             <a:r>
-              <a:rPr lang="en-US" smtClean="0"/>
+              <a:rPr lang="en-US"/>
               <a:t>Fifth level</a:t>
             </a:r>
-            <a:endParaRPr lang="en-US"/>
           </a:p>
         </p:txBody>
       </p:sp>
@@ -496,7 +508,7 @@
           <a:p>
             <a:fld id="{5BCAD085-E8A6-8845-BD4E-CB4CCA059FC4}" type="datetimeFigureOut">
               <a:rPr lang="en-US" smtClean="0"/>
-              <a:t>1/27/13</a:t>
+              <a:t>4/7/2026</a:t>
             </a:fld>
             <a:endParaRPr lang="en-US"/>
           </a:p>
@@ -595,10 +607,9 @@
           <a:lstStyle/>
           <a:p>
             <a:r>
-              <a:rPr lang="en-US" smtClean="0"/>
+              <a:rPr lang="en-US"/>
               <a:t>Click to edit Master title style</a:t>
             </a:r>
-            <a:endParaRPr lang="en-US"/>
           </a:p>
         </p:txBody>
       </p:sp>
@@ -624,38 +635,37 @@
           <a:p>
             <a:pPr lvl="0"/>
             <a:r>
-              <a:rPr lang="en-US" smtClean="0"/>
+              <a:rPr lang="en-US"/>
               <a:t>Click to edit Master text styles</a:t>
             </a:r>
           </a:p>
           <a:p>
             <a:pPr lvl="1"/>
             <a:r>
-              <a:rPr lang="en-US" smtClean="0"/>
+              <a:rPr lang="en-US"/>
               <a:t>Second level</a:t>
             </a:r>
           </a:p>
           <a:p>
             <a:pPr lvl="2"/>
             <a:r>
-              <a:rPr lang="en-US" smtClean="0"/>
+              <a:rPr lang="en-US"/>
               <a:t>Third level</a:t>
             </a:r>
           </a:p>
           <a:p>
             <a:pPr lvl="3"/>
             <a:r>
-              <a:rPr lang="en-US" smtClean="0"/>
+              <a:rPr lang="en-US"/>
               <a:t>Fourth level</a:t>
             </a:r>
           </a:p>
           <a:p>
             <a:pPr lvl="4"/>
             <a:r>
-              <a:rPr lang="en-US" smtClean="0"/>
+              <a:rPr lang="en-US"/>
               <a:t>Fifth level</a:t>
             </a:r>
-            <a:endParaRPr lang="en-US"/>
           </a:p>
         </p:txBody>
       </p:sp>
@@ -676,7 +686,7 @@
           <a:p>
             <a:fld id="{5BCAD085-E8A6-8845-BD4E-CB4CCA059FC4}" type="datetimeFigureOut">
               <a:rPr lang="en-US" smtClean="0"/>
-              <a:t>1/27/13</a:t>
+              <a:t>4/7/2026</a:t>
             </a:fld>
             <a:endParaRPr lang="en-US"/>
           </a:p>
@@ -770,10 +780,9 @@
           <a:lstStyle/>
           <a:p>
             <a:r>
-              <a:rPr lang="en-US" smtClean="0"/>
+              <a:rPr lang="en-US"/>
               <a:t>Click to edit Master title style</a:t>
             </a:r>
-            <a:endParaRPr lang="en-US"/>
           </a:p>
         </p:txBody>
       </p:sp>
@@ -794,38 +803,37 @@
           <a:p>
             <a:pPr lvl="0"/>
             <a:r>
-              <a:rPr lang="en-US" smtClean="0"/>
+              <a:rPr lang="en-US"/>
               <a:t>Click to edit Master text styles</a:t>
             </a:r>
           </a:p>
           <a:p>
             <a:pPr lvl="1"/>
             <a:r>
-              <a:rPr lang="en-US" smtClean="0"/>
+              <a:rPr lang="en-US"/>
               <a:t>Second level</a:t>
             </a:r>
           </a:p>
           <a:p>
             <a:pPr lvl="2"/>
             <a:r>
-              <a:rPr lang="en-US" smtClean="0"/>
+              <a:rPr lang="en-US"/>
               <a:t>Third level</a:t>
             </a:r>
           </a:p>
           <a:p>
             <a:pPr lvl="3"/>
             <a:r>
-              <a:rPr lang="en-US" smtClean="0"/>
+              <a:rPr lang="en-US"/>
               <a:t>Fourth level</a:t>
             </a:r>
           </a:p>
           <a:p>
             <a:pPr lvl="4"/>
             <a:r>
-              <a:rPr lang="en-US" smtClean="0"/>
+              <a:rPr lang="en-US"/>
               <a:t>Fifth level</a:t>
             </a:r>
-            <a:endParaRPr lang="en-US"/>
           </a:p>
         </p:txBody>
       </p:sp>
@@ -846,7 +854,7 @@
           <a:p>
             <a:fld id="{5BCAD085-E8A6-8845-BD4E-CB4CCA059FC4}" type="datetimeFigureOut">
               <a:rPr lang="en-US" smtClean="0"/>
-              <a:t>1/27/13</a:t>
+              <a:t>4/7/2026</a:t>
             </a:fld>
             <a:endParaRPr lang="en-US"/>
           </a:p>
@@ -949,10 +957,9 @@
           </a:lstStyle>
           <a:p>
             <a:r>
-              <a:rPr lang="en-US" smtClean="0"/>
+              <a:rPr lang="en-US"/>
               <a:t>Click to edit Master title style</a:t>
             </a:r>
-            <a:endParaRPr lang="en-US"/>
           </a:p>
         </p:txBody>
       </p:sp>
@@ -1069,7 +1076,7 @@
           <a:p>
             <a:pPr lvl="0"/>
             <a:r>
-              <a:rPr lang="en-US" smtClean="0"/>
+              <a:rPr lang="en-US"/>
               <a:t>Click to edit Master text styles</a:t>
             </a:r>
           </a:p>
@@ -1092,7 +1099,7 @@
           <a:p>
             <a:fld id="{5BCAD085-E8A6-8845-BD4E-CB4CCA059FC4}" type="datetimeFigureOut">
               <a:rPr lang="en-US" smtClean="0"/>
-              <a:t>1/27/13</a:t>
+              <a:t>4/7/2026</a:t>
             </a:fld>
             <a:endParaRPr lang="en-US"/>
           </a:p>
@@ -1186,10 +1193,9 @@
           <a:lstStyle/>
           <a:p>
             <a:r>
-              <a:rPr lang="en-US" smtClean="0"/>
+              <a:rPr lang="en-US"/>
               <a:t>Click to edit Master title style</a:t>
             </a:r>
-            <a:endParaRPr lang="en-US"/>
           </a:p>
         </p:txBody>
       </p:sp>
@@ -1243,38 +1249,37 @@
           <a:p>
             <a:pPr lvl="0"/>
             <a:r>
-              <a:rPr lang="en-US" smtClean="0"/>
+              <a:rPr lang="en-US"/>
               <a:t>Click to edit Master text styles</a:t>
             </a:r>
           </a:p>
           <a:p>
             <a:pPr lvl="1"/>
             <a:r>
-              <a:rPr lang="en-US" smtClean="0"/>
+              <a:rPr lang="en-US"/>
               <a:t>Second level</a:t>
             </a:r>
           </a:p>
           <a:p>
             <a:pPr lvl="2"/>
             <a:r>
-              <a:rPr lang="en-US" smtClean="0"/>
+              <a:rPr lang="en-US"/>
               <a:t>Third level</a:t>
             </a:r>
           </a:p>
           <a:p>
             <a:pPr lvl="3"/>
             <a:r>
-              <a:rPr lang="en-US" smtClean="0"/>
+              <a:rPr lang="en-US"/>
               <a:t>Fourth level</a:t>
             </a:r>
           </a:p>
           <a:p>
             <a:pPr lvl="4"/>
             <a:r>
-              <a:rPr lang="en-US" smtClean="0"/>
+              <a:rPr lang="en-US"/>
               <a:t>Fifth level</a:t>
             </a:r>
-            <a:endParaRPr lang="en-US"/>
           </a:p>
         </p:txBody>
       </p:sp>
@@ -1328,38 +1333,37 @@
           <a:p>
             <a:pPr lvl="0"/>
             <a:r>
-              <a:rPr lang="en-US" smtClean="0"/>
+              <a:rPr lang="en-US"/>
               <a:t>Click to edit Master text styles</a:t>
             </a:r>
           </a:p>
           <a:p>
             <a:pPr lvl="1"/>
             <a:r>
-              <a:rPr lang="en-US" smtClean="0"/>
+              <a:rPr lang="en-US"/>
               <a:t>Second level</a:t>
             </a:r>
           </a:p>
           <a:p>
             <a:pPr lvl="2"/>
             <a:r>
-              <a:rPr lang="en-US" smtClean="0"/>
+              <a:rPr lang="en-US"/>
               <a:t>Third level</a:t>
             </a:r>
           </a:p>
           <a:p>
             <a:pPr lvl="3"/>
             <a:r>
-              <a:rPr lang="en-US" smtClean="0"/>
+              <a:rPr lang="en-US"/>
               <a:t>Fourth level</a:t>
             </a:r>
           </a:p>
           <a:p>
             <a:pPr lvl="4"/>
             <a:r>
-              <a:rPr lang="en-US" smtClean="0"/>
+              <a:rPr lang="en-US"/>
               <a:t>Fifth level</a:t>
             </a:r>
-            <a:endParaRPr lang="en-US"/>
           </a:p>
         </p:txBody>
       </p:sp>
@@ -1380,7 +1384,7 @@
           <a:p>
             <a:fld id="{5BCAD085-E8A6-8845-BD4E-CB4CCA059FC4}" type="datetimeFigureOut">
               <a:rPr lang="en-US" smtClean="0"/>
-              <a:t>1/27/13</a:t>
+              <a:t>4/7/2026</a:t>
             </a:fld>
             <a:endParaRPr lang="en-US"/>
           </a:p>
@@ -1478,10 +1482,9 @@
           </a:lstStyle>
           <a:p>
             <a:r>
-              <a:rPr lang="en-US" smtClean="0"/>
+              <a:rPr lang="en-US"/>
               <a:t>Click to edit Master title style</a:t>
             </a:r>
-            <a:endParaRPr lang="en-US"/>
           </a:p>
         </p:txBody>
       </p:sp>
@@ -1544,7 +1547,7 @@
           <a:p>
             <a:pPr lvl="0"/>
             <a:r>
-              <a:rPr lang="en-US" smtClean="0"/>
+              <a:rPr lang="en-US"/>
               <a:t>Click to edit Master text styles</a:t>
             </a:r>
           </a:p>
@@ -1600,38 +1603,37 @@
           <a:p>
             <a:pPr lvl="0"/>
             <a:r>
-              <a:rPr lang="en-US" smtClean="0"/>
+              <a:rPr lang="en-US"/>
               <a:t>Click to edit Master text styles</a:t>
             </a:r>
           </a:p>
           <a:p>
             <a:pPr lvl="1"/>
             <a:r>
-              <a:rPr lang="en-US" smtClean="0"/>
+              <a:rPr lang="en-US"/>
               <a:t>Second level</a:t>
             </a:r>
           </a:p>
           <a:p>
             <a:pPr lvl="2"/>
             <a:r>
-              <a:rPr lang="en-US" smtClean="0"/>
+              <a:rPr lang="en-US"/>
               <a:t>Third level</a:t>
             </a:r>
           </a:p>
           <a:p>
             <a:pPr lvl="3"/>
             <a:r>
-              <a:rPr lang="en-US" smtClean="0"/>
+              <a:rPr lang="en-US"/>
               <a:t>Fourth level</a:t>
             </a:r>
           </a:p>
           <a:p>
             <a:pPr lvl="4"/>
             <a:r>
-              <a:rPr lang="en-US" smtClean="0"/>
+              <a:rPr lang="en-US"/>
               <a:t>Fifth level</a:t>
             </a:r>
-            <a:endParaRPr lang="en-US"/>
           </a:p>
         </p:txBody>
       </p:sp>
@@ -1694,7 +1696,7 @@
           <a:p>
             <a:pPr lvl="0"/>
             <a:r>
-              <a:rPr lang="en-US" smtClean="0"/>
+              <a:rPr lang="en-US"/>
               <a:t>Click to edit Master text styles</a:t>
             </a:r>
           </a:p>
@@ -1750,38 +1752,37 @@
           <a:p>
             <a:pPr lvl="0"/>
             <a:r>
-              <a:rPr lang="en-US" smtClean="0"/>
+              <a:rPr lang="en-US"/>
               <a:t>Click to edit Master text styles</a:t>
             </a:r>
           </a:p>
           <a:p>
             <a:pPr lvl="1"/>
             <a:r>
-              <a:rPr lang="en-US" smtClean="0"/>
+              <a:rPr lang="en-US"/>
               <a:t>Second level</a:t>
             </a:r>
           </a:p>
           <a:p>
             <a:pPr lvl="2"/>
             <a:r>
-              <a:rPr lang="en-US" smtClean="0"/>
+              <a:rPr lang="en-US"/>
               <a:t>Third level</a:t>
             </a:r>
           </a:p>
           <a:p>
             <a:pPr lvl="3"/>
             <a:r>
-              <a:rPr lang="en-US" smtClean="0"/>
+              <a:rPr lang="en-US"/>
               <a:t>Fourth level</a:t>
             </a:r>
           </a:p>
           <a:p>
             <a:pPr lvl="4"/>
             <a:r>
-              <a:rPr lang="en-US" smtClean="0"/>
+              <a:rPr lang="en-US"/>
               <a:t>Fifth level</a:t>
             </a:r>
-            <a:endParaRPr lang="en-US"/>
           </a:p>
         </p:txBody>
       </p:sp>
@@ -1802,7 +1803,7 @@
           <a:p>
             <a:fld id="{5BCAD085-E8A6-8845-BD4E-CB4CCA059FC4}" type="datetimeFigureOut">
               <a:rPr lang="en-US" smtClean="0"/>
-              <a:t>1/27/13</a:t>
+              <a:t>4/7/2026</a:t>
             </a:fld>
             <a:endParaRPr lang="en-US"/>
           </a:p>
@@ -1896,10 +1897,9 @@
           <a:lstStyle/>
           <a:p>
             <a:r>
-              <a:rPr lang="en-US" smtClean="0"/>
+              <a:rPr lang="en-US"/>
               <a:t>Click to edit Master title style</a:t>
             </a:r>
-            <a:endParaRPr lang="en-US"/>
           </a:p>
         </p:txBody>
       </p:sp>
@@ -1920,7 +1920,7 @@
           <a:p>
             <a:fld id="{5BCAD085-E8A6-8845-BD4E-CB4CCA059FC4}" type="datetimeFigureOut">
               <a:rPr lang="en-US" smtClean="0"/>
-              <a:t>1/27/13</a:t>
+              <a:t>4/7/2026</a:t>
             </a:fld>
             <a:endParaRPr lang="en-US"/>
           </a:p>
@@ -2015,7 +2015,7 @@
           <a:p>
             <a:fld id="{5BCAD085-E8A6-8845-BD4E-CB4CCA059FC4}" type="datetimeFigureOut">
               <a:rPr lang="en-US" smtClean="0"/>
-              <a:t>1/27/13</a:t>
+              <a:t>4/7/2026</a:t>
             </a:fld>
             <a:endParaRPr lang="en-US"/>
           </a:p>
@@ -2118,10 +2118,9 @@
           </a:lstStyle>
           <a:p>
             <a:r>
-              <a:rPr lang="en-US" smtClean="0"/>
+              <a:rPr lang="en-US"/>
               <a:t>Click to edit Master title style</a:t>
             </a:r>
-            <a:endParaRPr lang="en-US"/>
           </a:p>
         </p:txBody>
       </p:sp>
@@ -2175,38 +2174,37 @@
           <a:p>
             <a:pPr lvl="0"/>
             <a:r>
-              <a:rPr lang="en-US" smtClean="0"/>
+              <a:rPr lang="en-US"/>
               <a:t>Click to edit Master text styles</a:t>
             </a:r>
           </a:p>
           <a:p>
             <a:pPr lvl="1"/>
             <a:r>
-              <a:rPr lang="en-US" smtClean="0"/>
+              <a:rPr lang="en-US"/>
               <a:t>Second level</a:t>
             </a:r>
           </a:p>
           <a:p>
             <a:pPr lvl="2"/>
             <a:r>
-              <a:rPr lang="en-US" smtClean="0"/>
+              <a:rPr lang="en-US"/>
               <a:t>Third level</a:t>
             </a:r>
           </a:p>
           <a:p>
             <a:pPr lvl="3"/>
             <a:r>
-              <a:rPr lang="en-US" smtClean="0"/>
+              <a:rPr lang="en-US"/>
               <a:t>Fourth level</a:t>
             </a:r>
           </a:p>
           <a:p>
             <a:pPr lvl="4"/>
             <a:r>
-              <a:rPr lang="en-US" smtClean="0"/>
+              <a:rPr lang="en-US"/>
               <a:t>Fifth level</a:t>
             </a:r>
-            <a:endParaRPr lang="en-US"/>
           </a:p>
         </p:txBody>
       </p:sp>
@@ -2269,7 +2267,7 @@
           <a:p>
             <a:pPr lvl="0"/>
             <a:r>
-              <a:rPr lang="en-US" smtClean="0"/>
+              <a:rPr lang="en-US"/>
               <a:t>Click to edit Master text styles</a:t>
             </a:r>
           </a:p>
@@ -2292,7 +2290,7 @@
           <a:p>
             <a:fld id="{5BCAD085-E8A6-8845-BD4E-CB4CCA059FC4}" type="datetimeFigureOut">
               <a:rPr lang="en-US" smtClean="0"/>
-              <a:t>1/27/13</a:t>
+              <a:t>4/7/2026</a:t>
             </a:fld>
             <a:endParaRPr lang="en-US"/>
           </a:p>
@@ -2395,10 +2393,9 @@
           </a:lstStyle>
           <a:p>
             <a:r>
-              <a:rPr lang="en-US" smtClean="0"/>
+              <a:rPr lang="en-US"/>
               <a:t>Click to edit Master title style</a:t>
             </a:r>
-            <a:endParaRPr lang="en-US"/>
           </a:p>
         </p:txBody>
       </p:sp>
@@ -2522,7 +2519,7 @@
           <a:p>
             <a:pPr lvl="0"/>
             <a:r>
-              <a:rPr lang="en-US" smtClean="0"/>
+              <a:rPr lang="en-US"/>
               <a:t>Click to edit Master text styles</a:t>
             </a:r>
           </a:p>
@@ -2545,7 +2542,7 @@
           <a:p>
             <a:fld id="{5BCAD085-E8A6-8845-BD4E-CB4CCA059FC4}" type="datetimeFigureOut">
               <a:rPr lang="en-US" smtClean="0"/>
-              <a:t>1/27/13</a:t>
+              <a:t>4/7/2026</a:t>
             </a:fld>
             <a:endParaRPr lang="en-US"/>
           </a:p>
@@ -2654,10 +2651,9 @@
           <a:lstStyle/>
           <a:p>
             <a:r>
-              <a:rPr lang="en-US" smtClean="0"/>
+              <a:rPr lang="en-US"/>
               <a:t>Click to edit Master title style</a:t>
             </a:r>
-            <a:endParaRPr lang="en-US"/>
           </a:p>
         </p:txBody>
       </p:sp>
@@ -2688,38 +2684,37 @@
           <a:p>
             <a:pPr lvl="0"/>
             <a:r>
-              <a:rPr lang="en-US" smtClean="0"/>
+              <a:rPr lang="en-US"/>
               <a:t>Click to edit Master text styles</a:t>
             </a:r>
           </a:p>
           <a:p>
             <a:pPr lvl="1"/>
             <a:r>
-              <a:rPr lang="en-US" smtClean="0"/>
+              <a:rPr lang="en-US"/>
               <a:t>Second level</a:t>
             </a:r>
           </a:p>
           <a:p>
             <a:pPr lvl="2"/>
             <a:r>
-              <a:rPr lang="en-US" smtClean="0"/>
+              <a:rPr lang="en-US"/>
               <a:t>Third level</a:t>
             </a:r>
           </a:p>
           <a:p>
             <a:pPr lvl="3"/>
             <a:r>
-              <a:rPr lang="en-US" smtClean="0"/>
+              <a:rPr lang="en-US"/>
               <a:t>Fourth level</a:t>
             </a:r>
           </a:p>
           <a:p>
             <a:pPr lvl="4"/>
             <a:r>
-              <a:rPr lang="en-US" smtClean="0"/>
+              <a:rPr lang="en-US"/>
               <a:t>Fifth level</a:t>
             </a:r>
-            <a:endParaRPr lang="en-US"/>
           </a:p>
         </p:txBody>
       </p:sp>
@@ -2758,7 +2753,7 @@
           <a:p>
             <a:fld id="{5BCAD085-E8A6-8845-BD4E-CB4CCA059FC4}" type="datetimeFigureOut">
               <a:rPr lang="en-US" smtClean="0"/>
-              <a:t>1/27/13</a:t>
+              <a:t>4/7/2026</a:t>
             </a:fld>
             <a:endParaRPr lang="en-US"/>
           </a:p>
@@ -3117,7 +3112,7 @@
 </file>
 
 <file path=ppt/slides/slide1.xml><?xml version="1.0" encoding="utf-8"?>
-<p:sld xmlns:a="http://schemas.openxmlformats.org/drawingml/2006/main" xmlns:p="http://schemas.openxmlformats.org/presentationml/2006/main" xmlns:r="http://schemas.openxmlformats.org/officeDocument/2006/relationships">
+<p:sld xmlns:a="http://schemas.openxmlformats.org/drawingml/2006/main" xmlns:r="http://schemas.openxmlformats.org/officeDocument/2006/relationships" xmlns:p="http://schemas.openxmlformats.org/presentationml/2006/main">
   <p:cSld>
     <p:bg>
       <p:bgPr>
@@ -3133,7 +3128,14 @@
         <p:cNvGrpSpPr/>
         <p:nvPr/>
       </p:nvGrpSpPr>
-      <p:grpSpPr/>
+      <p:grpSpPr>
+        <a:xfrm>
+          <a:off x="0" y="0"/>
+          <a:ext cx="0" cy="0"/>
+          <a:chOff x="0" y="0"/>
+          <a:chExt cx="0" cy="0"/>
+        </a:xfrm>
+      </p:grpSpPr>
       <p:sp>
         <p:nvSpPr>
           <p:cNvPr id="2" name="Rounded Rectangle 1"/>
@@ -3170,7 +3172,7 @@
           </a:fontRef>
         </p:style>
         <p:txBody>
-          <a:bodyPr rtlCol="0" anchor="ctr" wrap="none"/>
+          <a:bodyPr wrap="none" rtlCol="0" anchor="ctr"/>
           <a:lstStyle/>
           <a:p>
             <a:pPr algn="ctr"/>
@@ -3310,7 +3312,7 @@
           </a:fontRef>
         </p:style>
         <p:txBody>
-          <a:bodyPr rtlCol="0" anchor="ctr" wrap="none"/>
+          <a:bodyPr wrap="none" rtlCol="0" anchor="ctr"/>
           <a:lstStyle/>
           <a:p>
             <a:pPr algn="ctr">
@@ -3363,7 +3365,7 @@
           </a:fontRef>
         </p:style>
         <p:txBody>
-          <a:bodyPr rtlCol="0" anchor="ctr" wrap="none"/>
+          <a:bodyPr wrap="none" rtlCol="0" anchor="ctr"/>
           <a:lstStyle/>
           <a:p>
             <a:pPr algn="ctr">
@@ -3416,7 +3418,7 @@
           </a:fontRef>
         </p:style>
         <p:txBody>
-          <a:bodyPr rtlCol="0" anchor="ctr" wrap="none"/>
+          <a:bodyPr wrap="none" rtlCol="0" anchor="ctr"/>
           <a:lstStyle/>
           <a:p>
             <a:pPr algn="ctr">
@@ -3469,7 +3471,7 @@
           </a:fontRef>
         </p:style>
         <p:txBody>
-          <a:bodyPr rtlCol="0" anchor="ctr" wrap="none"/>
+          <a:bodyPr wrap="none" rtlCol="0" anchor="ctr"/>
           <a:lstStyle/>
           <a:p>
             <a:pPr algn="ctr">
@@ -3495,7 +3497,7 @@
 </file>
 
 <file path=ppt/slides/slide10.xml><?xml version="1.0" encoding="utf-8"?>
-<p:sld xmlns:a="http://schemas.openxmlformats.org/drawingml/2006/main" xmlns:p="http://schemas.openxmlformats.org/presentationml/2006/main" xmlns:r="http://schemas.openxmlformats.org/officeDocument/2006/relationships">
+<p:sld xmlns:a="http://schemas.openxmlformats.org/drawingml/2006/main" xmlns:r="http://schemas.openxmlformats.org/officeDocument/2006/relationships" xmlns:p="http://schemas.openxmlformats.org/presentationml/2006/main">
   <p:cSld>
     <p:bg>
       <p:bgPr>
@@ -3511,7 +3513,14 @@
         <p:cNvGrpSpPr/>
         <p:nvPr/>
       </p:nvGrpSpPr>
-      <p:grpSpPr/>
+      <p:grpSpPr>
+        <a:xfrm>
+          <a:off x="0" y="0"/>
+          <a:ext cx="0" cy="0"/>
+          <a:chOff x="0" y="0"/>
+          <a:chExt cx="0" cy="0"/>
+        </a:xfrm>
+      </p:grpSpPr>
       <p:sp>
         <p:nvSpPr>
           <p:cNvPr id="2" name="TextBox 1"/>
@@ -3677,7 +3686,7 @@
 </file>
 
 <file path=ppt/slides/slide11.xml><?xml version="1.0" encoding="utf-8"?>
-<p:sld xmlns:a="http://schemas.openxmlformats.org/drawingml/2006/main" xmlns:p="http://schemas.openxmlformats.org/presentationml/2006/main" xmlns:r="http://schemas.openxmlformats.org/officeDocument/2006/relationships">
+<p:sld xmlns:a="http://schemas.openxmlformats.org/drawingml/2006/main" xmlns:r="http://schemas.openxmlformats.org/officeDocument/2006/relationships" xmlns:p="http://schemas.openxmlformats.org/presentationml/2006/main">
   <p:cSld>
     <p:bg>
       <p:bgPr>
@@ -3693,7 +3702,14 @@
         <p:cNvGrpSpPr/>
         <p:nvPr/>
       </p:nvGrpSpPr>
-      <p:grpSpPr/>
+      <p:grpSpPr>
+        <a:xfrm>
+          <a:off x="0" y="0"/>
+          <a:ext cx="0" cy="0"/>
+          <a:chOff x="0" y="0"/>
+          <a:chExt cx="0" cy="0"/>
+        </a:xfrm>
+      </p:grpSpPr>
       <p:sp>
         <p:nvSpPr>
           <p:cNvPr id="2" name="TextBox 1"/>
@@ -3859,7 +3875,7 @@
 </file>
 
 <file path=ppt/slides/slide12.xml><?xml version="1.0" encoding="utf-8"?>
-<p:sld xmlns:a="http://schemas.openxmlformats.org/drawingml/2006/main" xmlns:p="http://schemas.openxmlformats.org/presentationml/2006/main" xmlns:r="http://schemas.openxmlformats.org/officeDocument/2006/relationships">
+<p:sld xmlns:a="http://schemas.openxmlformats.org/drawingml/2006/main" xmlns:r="http://schemas.openxmlformats.org/officeDocument/2006/relationships" xmlns:p="http://schemas.openxmlformats.org/presentationml/2006/main">
   <p:cSld>
     <p:bg>
       <p:bgPr>
@@ -3875,7 +3891,14 @@
         <p:cNvGrpSpPr/>
         <p:nvPr/>
       </p:nvGrpSpPr>
-      <p:grpSpPr/>
+      <p:grpSpPr>
+        <a:xfrm>
+          <a:off x="0" y="0"/>
+          <a:ext cx="0" cy="0"/>
+          <a:chOff x="0" y="0"/>
+          <a:chExt cx="0" cy="0"/>
+        </a:xfrm>
+      </p:grpSpPr>
       <p:sp>
         <p:nvSpPr>
           <p:cNvPr id="2" name="TextBox 1"/>
@@ -4041,7 +4064,7 @@
 </file>
 
 <file path=ppt/slides/slide13.xml><?xml version="1.0" encoding="utf-8"?>
-<p:sld xmlns:a="http://schemas.openxmlformats.org/drawingml/2006/main" xmlns:p="http://schemas.openxmlformats.org/presentationml/2006/main" xmlns:r="http://schemas.openxmlformats.org/officeDocument/2006/relationships">
+<p:sld xmlns:a="http://schemas.openxmlformats.org/drawingml/2006/main" xmlns:r="http://schemas.openxmlformats.org/officeDocument/2006/relationships" xmlns:p="http://schemas.openxmlformats.org/presentationml/2006/main">
   <p:cSld>
     <p:bg>
       <p:bgPr>
@@ -4057,7 +4080,14 @@
         <p:cNvGrpSpPr/>
         <p:nvPr/>
       </p:nvGrpSpPr>
-      <p:grpSpPr/>
+      <p:grpSpPr>
+        <a:xfrm>
+          <a:off x="0" y="0"/>
+          <a:ext cx="0" cy="0"/>
+          <a:chOff x="0" y="0"/>
+          <a:chExt cx="0" cy="0"/>
+        </a:xfrm>
+      </p:grpSpPr>
       <p:sp>
         <p:nvSpPr>
           <p:cNvPr id="2" name="TextBox 1"/>
@@ -4223,7 +4253,7 @@
 </file>
 
 <file path=ppt/slides/slide14.xml><?xml version="1.0" encoding="utf-8"?>
-<p:sld xmlns:a="http://schemas.openxmlformats.org/drawingml/2006/main" xmlns:p="http://schemas.openxmlformats.org/presentationml/2006/main" xmlns:r="http://schemas.openxmlformats.org/officeDocument/2006/relationships">
+<p:sld xmlns:a="http://schemas.openxmlformats.org/drawingml/2006/main" xmlns:r="http://schemas.openxmlformats.org/officeDocument/2006/relationships" xmlns:p="http://schemas.openxmlformats.org/presentationml/2006/main">
   <p:cSld>
     <p:bg>
       <p:bgPr>
@@ -4239,7 +4269,14 @@
         <p:cNvGrpSpPr/>
         <p:nvPr/>
       </p:nvGrpSpPr>
-      <p:grpSpPr/>
+      <p:grpSpPr>
+        <a:xfrm>
+          <a:off x="0" y="0"/>
+          <a:ext cx="0" cy="0"/>
+          <a:chOff x="0" y="0"/>
+          <a:chExt cx="0" cy="0"/>
+        </a:xfrm>
+      </p:grpSpPr>
       <p:sp>
         <p:nvSpPr>
           <p:cNvPr id="2" name="TextBox 1"/>
@@ -4405,7 +4442,7 @@
 </file>
 
 <file path=ppt/slides/slide15.xml><?xml version="1.0" encoding="utf-8"?>
-<p:sld xmlns:a="http://schemas.openxmlformats.org/drawingml/2006/main" xmlns:p="http://schemas.openxmlformats.org/presentationml/2006/main" xmlns:r="http://schemas.openxmlformats.org/officeDocument/2006/relationships">
+<p:sld xmlns:a="http://schemas.openxmlformats.org/drawingml/2006/main" xmlns:r="http://schemas.openxmlformats.org/officeDocument/2006/relationships" xmlns:p="http://schemas.openxmlformats.org/presentationml/2006/main">
   <p:cSld>
     <p:bg>
       <p:bgPr>
@@ -4421,7 +4458,14 @@
         <p:cNvGrpSpPr/>
         <p:nvPr/>
       </p:nvGrpSpPr>
-      <p:grpSpPr/>
+      <p:grpSpPr>
+        <a:xfrm>
+          <a:off x="0" y="0"/>
+          <a:ext cx="0" cy="0"/>
+          <a:chOff x="0" y="0"/>
+          <a:chExt cx="0" cy="0"/>
+        </a:xfrm>
+      </p:grpSpPr>
       <p:sp>
         <p:nvSpPr>
           <p:cNvPr id="2" name="TextBox 1"/>
@@ -4959,7 +5003,7 @@
 </file>
 
 <file path=ppt/slides/slide16.xml><?xml version="1.0" encoding="utf-8"?>
-<p:sld xmlns:a="http://schemas.openxmlformats.org/drawingml/2006/main" xmlns:p="http://schemas.openxmlformats.org/presentationml/2006/main" xmlns:r="http://schemas.openxmlformats.org/officeDocument/2006/relationships">
+<p:sld xmlns:a="http://schemas.openxmlformats.org/drawingml/2006/main" xmlns:r="http://schemas.openxmlformats.org/officeDocument/2006/relationships" xmlns:p="http://schemas.openxmlformats.org/presentationml/2006/main">
   <p:cSld>
     <p:bg>
       <p:bgPr>
@@ -4975,7 +5019,14 @@
         <p:cNvGrpSpPr/>
         <p:nvPr/>
       </p:nvGrpSpPr>
-      <p:grpSpPr/>
+      <p:grpSpPr>
+        <a:xfrm>
+          <a:off x="0" y="0"/>
+          <a:ext cx="0" cy="0"/>
+          <a:chOff x="0" y="0"/>
+          <a:chExt cx="0" cy="0"/>
+        </a:xfrm>
+      </p:grpSpPr>
       <p:sp>
         <p:nvSpPr>
           <p:cNvPr id="2" name="Rectangle 1"/>
@@ -5016,6 +5067,7 @@
           <a:lstStyle/>
           <a:p>
             <a:pPr algn="ctr"/>
+            <a:endParaRPr/>
           </a:p>
         </p:txBody>
       </p:sp>
@@ -5100,7 +5152,7 @@
 </file>
 
 <file path=ppt/slides/slide17.xml><?xml version="1.0" encoding="utf-8"?>
-<p:sld xmlns:a="http://schemas.openxmlformats.org/drawingml/2006/main" xmlns:p="http://schemas.openxmlformats.org/presentationml/2006/main" xmlns:r="http://schemas.openxmlformats.org/officeDocument/2006/relationships">
+<p:sld xmlns:a="http://schemas.openxmlformats.org/drawingml/2006/main" xmlns:r="http://schemas.openxmlformats.org/officeDocument/2006/relationships" xmlns:p="http://schemas.openxmlformats.org/presentationml/2006/main">
   <p:cSld>
     <p:bg>
       <p:bgPr>
@@ -5116,7 +5168,14 @@
         <p:cNvGrpSpPr/>
         <p:nvPr/>
       </p:nvGrpSpPr>
-      <p:grpSpPr/>
+      <p:grpSpPr>
+        <a:xfrm>
+          <a:off x="0" y="0"/>
+          <a:ext cx="0" cy="0"/>
+          <a:chOff x="0" y="0"/>
+          <a:chExt cx="0" cy="0"/>
+        </a:xfrm>
+      </p:grpSpPr>
       <p:sp>
         <p:nvSpPr>
           <p:cNvPr id="2" name="TextBox 1"/>
@@ -5169,8 +5228,8 @@
         </p:blipFill>
         <p:spPr>
           <a:xfrm>
-            <a:off x="731520" y="1005840"/>
-            <a:ext cx="10698480" cy="6686550"/>
+            <a:off x="1930861" y="1005840"/>
+            <a:ext cx="8330278" cy="5206424"/>
           </a:xfrm>
           <a:prstGeom prst="rect">
             <a:avLst/>
@@ -5222,7 +5281,7 @@
 </file>
 
 <file path=ppt/slides/slide18.xml><?xml version="1.0" encoding="utf-8"?>
-<p:sld xmlns:a="http://schemas.openxmlformats.org/drawingml/2006/main" xmlns:p="http://schemas.openxmlformats.org/presentationml/2006/main" xmlns:r="http://schemas.openxmlformats.org/officeDocument/2006/relationships">
+<p:sld xmlns:a="http://schemas.openxmlformats.org/drawingml/2006/main" xmlns:r="http://schemas.openxmlformats.org/officeDocument/2006/relationships" xmlns:p="http://schemas.openxmlformats.org/presentationml/2006/main">
   <p:cSld>
     <p:bg>
       <p:bgPr>
@@ -5238,7 +5297,14 @@
         <p:cNvGrpSpPr/>
         <p:nvPr/>
       </p:nvGrpSpPr>
-      <p:grpSpPr/>
+      <p:grpSpPr>
+        <a:xfrm>
+          <a:off x="0" y="0"/>
+          <a:ext cx="0" cy="0"/>
+          <a:chOff x="0" y="0"/>
+          <a:chExt cx="0" cy="0"/>
+        </a:xfrm>
+      </p:grpSpPr>
       <p:sp>
         <p:nvSpPr>
           <p:cNvPr id="2" name="TextBox 1"/>
@@ -5584,7 +5650,7 @@
 </file>
 
 <file path=ppt/slides/slide19.xml><?xml version="1.0" encoding="utf-8"?>
-<p:sld xmlns:a="http://schemas.openxmlformats.org/drawingml/2006/main" xmlns:p="http://schemas.openxmlformats.org/presentationml/2006/main" xmlns:r="http://schemas.openxmlformats.org/officeDocument/2006/relationships">
+<p:sld xmlns:a="http://schemas.openxmlformats.org/drawingml/2006/main" xmlns:r="http://schemas.openxmlformats.org/officeDocument/2006/relationships" xmlns:p="http://schemas.openxmlformats.org/presentationml/2006/main">
   <p:cSld>
     <p:bg>
       <p:bgPr>
@@ -5600,7 +5666,14 @@
         <p:cNvGrpSpPr/>
         <p:nvPr/>
       </p:nvGrpSpPr>
-      <p:grpSpPr/>
+      <p:grpSpPr>
+        <a:xfrm>
+          <a:off x="0" y="0"/>
+          <a:ext cx="0" cy="0"/>
+          <a:chOff x="0" y="0"/>
+          <a:chExt cx="0" cy="0"/>
+        </a:xfrm>
+      </p:grpSpPr>
       <p:sp>
         <p:nvSpPr>
           <p:cNvPr id="2" name="TextBox 1"/>
@@ -5653,8 +5726,8 @@
         </p:blipFill>
         <p:spPr>
           <a:xfrm>
-            <a:off x="731520" y="1005840"/>
-            <a:ext cx="10698480" cy="6686550"/>
+            <a:off x="1719072" y="914400"/>
+            <a:ext cx="8631936" cy="5394960"/>
           </a:xfrm>
           <a:prstGeom prst="rect">
             <a:avLst/>
@@ -5706,7 +5779,7 @@
 </file>
 
 <file path=ppt/slides/slide2.xml><?xml version="1.0" encoding="utf-8"?>
-<p:sld xmlns:a="http://schemas.openxmlformats.org/drawingml/2006/main" xmlns:p="http://schemas.openxmlformats.org/presentationml/2006/main" xmlns:r="http://schemas.openxmlformats.org/officeDocument/2006/relationships">
+<p:sld xmlns:a="http://schemas.openxmlformats.org/drawingml/2006/main" xmlns:r="http://schemas.openxmlformats.org/officeDocument/2006/relationships" xmlns:p="http://schemas.openxmlformats.org/presentationml/2006/main">
   <p:cSld>
     <p:bg>
       <p:bgPr>
@@ -5722,7 +5795,14 @@
         <p:cNvGrpSpPr/>
         <p:nvPr/>
       </p:nvGrpSpPr>
-      <p:grpSpPr/>
+      <p:grpSpPr>
+        <a:xfrm>
+          <a:off x="0" y="0"/>
+          <a:ext cx="0" cy="0"/>
+          <a:chOff x="0" y="0"/>
+          <a:chExt cx="0" cy="0"/>
+        </a:xfrm>
+      </p:grpSpPr>
       <p:sp>
         <p:nvSpPr>
           <p:cNvPr id="2" name="TextBox 1"/>
@@ -5815,6 +5895,7 @@
           <a:lstStyle/>
           <a:p>
             <a:pPr algn="ctr"/>
+            <a:endParaRPr/>
           </a:p>
         </p:txBody>
       </p:sp>
@@ -5958,6 +6039,7 @@
           <a:lstStyle/>
           <a:p>
             <a:pPr algn="ctr"/>
+            <a:endParaRPr/>
           </a:p>
         </p:txBody>
       </p:sp>
@@ -6101,6 +6183,7 @@
           <a:lstStyle/>
           <a:p>
             <a:pPr algn="ctr"/>
+            <a:endParaRPr/>
           </a:p>
         </p:txBody>
       </p:sp>
@@ -6244,6 +6327,7 @@
           <a:lstStyle/>
           <a:p>
             <a:pPr algn="ctr"/>
+            <a:endParaRPr/>
           </a:p>
         </p:txBody>
       </p:sp>
@@ -6356,7 +6440,7 @@
 </file>
 
 <file path=ppt/slides/slide20.xml><?xml version="1.0" encoding="utf-8"?>
-<p:sld xmlns:a="http://schemas.openxmlformats.org/drawingml/2006/main" xmlns:p="http://schemas.openxmlformats.org/presentationml/2006/main" xmlns:r="http://schemas.openxmlformats.org/officeDocument/2006/relationships">
+<p:sld xmlns:a="http://schemas.openxmlformats.org/drawingml/2006/main" xmlns:r="http://schemas.openxmlformats.org/officeDocument/2006/relationships" xmlns:p="http://schemas.openxmlformats.org/presentationml/2006/main">
   <p:cSld>
     <p:bg>
       <p:bgPr>
@@ -6372,7 +6456,14 @@
         <p:cNvGrpSpPr/>
         <p:nvPr/>
       </p:nvGrpSpPr>
-      <p:grpSpPr/>
+      <p:grpSpPr>
+        <a:xfrm>
+          <a:off x="0" y="0"/>
+          <a:ext cx="0" cy="0"/>
+          <a:chOff x="0" y="0"/>
+          <a:chExt cx="0" cy="0"/>
+        </a:xfrm>
+      </p:grpSpPr>
       <p:sp>
         <p:nvSpPr>
           <p:cNvPr id="2" name="TextBox 1"/>
@@ -6538,7 +6629,7 @@
 </file>
 
 <file path=ppt/slides/slide21.xml><?xml version="1.0" encoding="utf-8"?>
-<p:sld xmlns:a="http://schemas.openxmlformats.org/drawingml/2006/main" xmlns:p="http://schemas.openxmlformats.org/presentationml/2006/main" xmlns:r="http://schemas.openxmlformats.org/officeDocument/2006/relationships">
+<p:sld xmlns:a="http://schemas.openxmlformats.org/drawingml/2006/main" xmlns:r="http://schemas.openxmlformats.org/officeDocument/2006/relationships" xmlns:p="http://schemas.openxmlformats.org/presentationml/2006/main">
   <p:cSld>
     <p:bg>
       <p:bgPr>
@@ -6554,7 +6645,14 @@
         <p:cNvGrpSpPr/>
         <p:nvPr/>
       </p:nvGrpSpPr>
-      <p:grpSpPr/>
+      <p:grpSpPr>
+        <a:xfrm>
+          <a:off x="0" y="0"/>
+          <a:ext cx="0" cy="0"/>
+          <a:chOff x="0" y="0"/>
+          <a:chExt cx="0" cy="0"/>
+        </a:xfrm>
+      </p:grpSpPr>
       <p:sp>
         <p:nvSpPr>
           <p:cNvPr id="2" name="Rectangle 1"/>
@@ -6595,6 +6693,7 @@
           <a:lstStyle/>
           <a:p>
             <a:pPr algn="ctr"/>
+            <a:endParaRPr/>
           </a:p>
         </p:txBody>
       </p:sp>
@@ -6679,7 +6778,7 @@
 </file>
 
 <file path=ppt/slides/slide22.xml><?xml version="1.0" encoding="utf-8"?>
-<p:sld xmlns:a="http://schemas.openxmlformats.org/drawingml/2006/main" xmlns:p="http://schemas.openxmlformats.org/presentationml/2006/main" xmlns:r="http://schemas.openxmlformats.org/officeDocument/2006/relationships">
+<p:sld xmlns:a="http://schemas.openxmlformats.org/drawingml/2006/main" xmlns:r="http://schemas.openxmlformats.org/officeDocument/2006/relationships" xmlns:p="http://schemas.openxmlformats.org/presentationml/2006/main">
   <p:cSld>
     <p:bg>
       <p:bgPr>
@@ -6695,7 +6794,14 @@
         <p:cNvGrpSpPr/>
         <p:nvPr/>
       </p:nvGrpSpPr>
-      <p:grpSpPr/>
+      <p:grpSpPr>
+        <a:xfrm>
+          <a:off x="0" y="0"/>
+          <a:ext cx="0" cy="0"/>
+          <a:chOff x="0" y="0"/>
+          <a:chExt cx="0" cy="0"/>
+        </a:xfrm>
+      </p:grpSpPr>
       <p:sp>
         <p:nvSpPr>
           <p:cNvPr id="2" name="TextBox 1"/>
@@ -6861,7 +6967,7 @@
 </file>
 
 <file path=ppt/slides/slide23.xml><?xml version="1.0" encoding="utf-8"?>
-<p:sld xmlns:a="http://schemas.openxmlformats.org/drawingml/2006/main" xmlns:p="http://schemas.openxmlformats.org/presentationml/2006/main" xmlns:r="http://schemas.openxmlformats.org/officeDocument/2006/relationships">
+<p:sld xmlns:a="http://schemas.openxmlformats.org/drawingml/2006/main" xmlns:r="http://schemas.openxmlformats.org/officeDocument/2006/relationships" xmlns:p="http://schemas.openxmlformats.org/presentationml/2006/main">
   <p:cSld>
     <p:bg>
       <p:bgPr>
@@ -6877,7 +6983,14 @@
         <p:cNvGrpSpPr/>
         <p:nvPr/>
       </p:nvGrpSpPr>
-      <p:grpSpPr/>
+      <p:grpSpPr>
+        <a:xfrm>
+          <a:off x="0" y="0"/>
+          <a:ext cx="0" cy="0"/>
+          <a:chOff x="0" y="0"/>
+          <a:chExt cx="0" cy="0"/>
+        </a:xfrm>
+      </p:grpSpPr>
       <p:sp>
         <p:nvSpPr>
           <p:cNvPr id="2" name="TextBox 1"/>
@@ -7043,7 +7156,7 @@
 </file>
 
 <file path=ppt/slides/slide24.xml><?xml version="1.0" encoding="utf-8"?>
-<p:sld xmlns:a="http://schemas.openxmlformats.org/drawingml/2006/main" xmlns:p="http://schemas.openxmlformats.org/presentationml/2006/main" xmlns:r="http://schemas.openxmlformats.org/officeDocument/2006/relationships">
+<p:sld xmlns:a="http://schemas.openxmlformats.org/drawingml/2006/main" xmlns:r="http://schemas.openxmlformats.org/officeDocument/2006/relationships" xmlns:p="http://schemas.openxmlformats.org/presentationml/2006/main">
   <p:cSld>
     <p:bg>
       <p:bgPr>
@@ -7059,7 +7172,14 @@
         <p:cNvGrpSpPr/>
         <p:nvPr/>
       </p:nvGrpSpPr>
-      <p:grpSpPr/>
+      <p:grpSpPr>
+        <a:xfrm>
+          <a:off x="0" y="0"/>
+          <a:ext cx="0" cy="0"/>
+          <a:chOff x="0" y="0"/>
+          <a:chExt cx="0" cy="0"/>
+        </a:xfrm>
+      </p:grpSpPr>
       <p:sp>
         <p:nvSpPr>
           <p:cNvPr id="2" name="Rectangle 1"/>
@@ -7100,6 +7220,7 @@
           <a:lstStyle/>
           <a:p>
             <a:pPr algn="ctr"/>
+            <a:endParaRPr/>
           </a:p>
         </p:txBody>
       </p:sp>
@@ -7184,7 +7305,7 @@
 </file>
 
 <file path=ppt/slides/slide25.xml><?xml version="1.0" encoding="utf-8"?>
-<p:sld xmlns:a="http://schemas.openxmlformats.org/drawingml/2006/main" xmlns:p="http://schemas.openxmlformats.org/presentationml/2006/main" xmlns:r="http://schemas.openxmlformats.org/officeDocument/2006/relationships">
+<p:sld xmlns:a="http://schemas.openxmlformats.org/drawingml/2006/main" xmlns:r="http://schemas.openxmlformats.org/officeDocument/2006/relationships" xmlns:p="http://schemas.openxmlformats.org/presentationml/2006/main">
   <p:cSld>
     <p:bg>
       <p:bgPr>
@@ -7200,7 +7321,14 @@
         <p:cNvGrpSpPr/>
         <p:nvPr/>
       </p:nvGrpSpPr>
-      <p:grpSpPr/>
+      <p:grpSpPr>
+        <a:xfrm>
+          <a:off x="0" y="0"/>
+          <a:ext cx="0" cy="0"/>
+          <a:chOff x="0" y="0"/>
+          <a:chExt cx="0" cy="0"/>
+        </a:xfrm>
+      </p:grpSpPr>
       <p:sp>
         <p:nvSpPr>
           <p:cNvPr id="2" name="TextBox 1"/>
@@ -7633,7 +7761,7 @@
 </file>
 
 <file path=ppt/slides/slide26.xml><?xml version="1.0" encoding="utf-8"?>
-<p:sld xmlns:a="http://schemas.openxmlformats.org/drawingml/2006/main" xmlns:p="http://schemas.openxmlformats.org/presentationml/2006/main" xmlns:r="http://schemas.openxmlformats.org/officeDocument/2006/relationships">
+<p:sld xmlns:a="http://schemas.openxmlformats.org/drawingml/2006/main" xmlns:r="http://schemas.openxmlformats.org/officeDocument/2006/relationships" xmlns:p="http://schemas.openxmlformats.org/presentationml/2006/main">
   <p:cSld>
     <p:bg>
       <p:bgPr>
@@ -7649,7 +7777,14 @@
         <p:cNvGrpSpPr/>
         <p:nvPr/>
       </p:nvGrpSpPr>
-      <p:grpSpPr/>
+      <p:grpSpPr>
+        <a:xfrm>
+          <a:off x="0" y="0"/>
+          <a:ext cx="0" cy="0"/>
+          <a:chOff x="0" y="0"/>
+          <a:chExt cx="0" cy="0"/>
+        </a:xfrm>
+      </p:grpSpPr>
       <p:sp>
         <p:nvSpPr>
           <p:cNvPr id="2" name="TextBox 1"/>
@@ -7815,7 +7950,7 @@
 </file>
 
 <file path=ppt/slides/slide27.xml><?xml version="1.0" encoding="utf-8"?>
-<p:sld xmlns:a="http://schemas.openxmlformats.org/drawingml/2006/main" xmlns:p="http://schemas.openxmlformats.org/presentationml/2006/main" xmlns:r="http://schemas.openxmlformats.org/officeDocument/2006/relationships">
+<p:sld xmlns:a="http://schemas.openxmlformats.org/drawingml/2006/main" xmlns:r="http://schemas.openxmlformats.org/officeDocument/2006/relationships" xmlns:p="http://schemas.openxmlformats.org/presentationml/2006/main">
   <p:cSld>
     <p:bg>
       <p:bgPr>
@@ -7831,7 +7966,14 @@
         <p:cNvGrpSpPr/>
         <p:nvPr/>
       </p:nvGrpSpPr>
-      <p:grpSpPr/>
+      <p:grpSpPr>
+        <a:xfrm>
+          <a:off x="0" y="0"/>
+          <a:ext cx="0" cy="0"/>
+          <a:chOff x="0" y="0"/>
+          <a:chExt cx="0" cy="0"/>
+        </a:xfrm>
+      </p:grpSpPr>
       <p:sp>
         <p:nvSpPr>
           <p:cNvPr id="2" name="Rectangle 1"/>
@@ -7872,6 +8014,7 @@
           <a:lstStyle/>
           <a:p>
             <a:pPr algn="ctr"/>
+            <a:endParaRPr/>
           </a:p>
         </p:txBody>
       </p:sp>
@@ -7956,7 +8099,7 @@
 </file>
 
 <file path=ppt/slides/slide28.xml><?xml version="1.0" encoding="utf-8"?>
-<p:sld xmlns:a="http://schemas.openxmlformats.org/drawingml/2006/main" xmlns:p="http://schemas.openxmlformats.org/presentationml/2006/main" xmlns:r="http://schemas.openxmlformats.org/officeDocument/2006/relationships">
+<p:sld xmlns:a="http://schemas.openxmlformats.org/drawingml/2006/main" xmlns:r="http://schemas.openxmlformats.org/officeDocument/2006/relationships" xmlns:p="http://schemas.openxmlformats.org/presentationml/2006/main">
   <p:cSld>
     <p:bg>
       <p:bgPr>
@@ -7972,7 +8115,14 @@
         <p:cNvGrpSpPr/>
         <p:nvPr/>
       </p:nvGrpSpPr>
-      <p:grpSpPr/>
+      <p:grpSpPr>
+        <a:xfrm>
+          <a:off x="0" y="0"/>
+          <a:ext cx="0" cy="0"/>
+          <a:chOff x="0" y="0"/>
+          <a:chExt cx="0" cy="0"/>
+        </a:xfrm>
+      </p:grpSpPr>
       <p:sp>
         <p:nvSpPr>
           <p:cNvPr id="2" name="TextBox 1"/>
@@ -8025,8 +8175,8 @@
         </p:blipFill>
         <p:spPr>
           <a:xfrm>
-            <a:off x="731520" y="1005840"/>
-            <a:ext cx="10698480" cy="6686550"/>
+            <a:off x="1930861" y="1005840"/>
+            <a:ext cx="8330278" cy="5206424"/>
           </a:xfrm>
           <a:prstGeom prst="rect">
             <a:avLst/>
@@ -8078,7 +8228,7 @@
 </file>
 
 <file path=ppt/slides/slide29.xml><?xml version="1.0" encoding="utf-8"?>
-<p:sld xmlns:a="http://schemas.openxmlformats.org/drawingml/2006/main" xmlns:p="http://schemas.openxmlformats.org/presentationml/2006/main" xmlns:r="http://schemas.openxmlformats.org/officeDocument/2006/relationships">
+<p:sld xmlns:a="http://schemas.openxmlformats.org/drawingml/2006/main" xmlns:r="http://schemas.openxmlformats.org/officeDocument/2006/relationships" xmlns:p="http://schemas.openxmlformats.org/presentationml/2006/main">
   <p:cSld>
     <p:bg>
       <p:bgPr>
@@ -8094,7 +8244,14 @@
         <p:cNvGrpSpPr/>
         <p:nvPr/>
       </p:nvGrpSpPr>
-      <p:grpSpPr/>
+      <p:grpSpPr>
+        <a:xfrm>
+          <a:off x="0" y="0"/>
+          <a:ext cx="0" cy="0"/>
+          <a:chOff x="0" y="0"/>
+          <a:chExt cx="0" cy="0"/>
+        </a:xfrm>
+      </p:grpSpPr>
       <p:sp>
         <p:nvSpPr>
           <p:cNvPr id="2" name="TextBox 1"/>
@@ -8408,7 +8565,7 @@
 </file>
 
 <file path=ppt/slides/slide3.xml><?xml version="1.0" encoding="utf-8"?>
-<p:sld xmlns:a="http://schemas.openxmlformats.org/drawingml/2006/main" xmlns:p="http://schemas.openxmlformats.org/presentationml/2006/main" xmlns:r="http://schemas.openxmlformats.org/officeDocument/2006/relationships">
+<p:sld xmlns:a="http://schemas.openxmlformats.org/drawingml/2006/main" xmlns:r="http://schemas.openxmlformats.org/officeDocument/2006/relationships" xmlns:p="http://schemas.openxmlformats.org/presentationml/2006/main">
   <p:cSld>
     <p:bg>
       <p:bgPr>
@@ -8424,7 +8581,14 @@
         <p:cNvGrpSpPr/>
         <p:nvPr/>
       </p:nvGrpSpPr>
-      <p:grpSpPr/>
+      <p:grpSpPr>
+        <a:xfrm>
+          <a:off x="0" y="0"/>
+          <a:ext cx="0" cy="0"/>
+          <a:chOff x="0" y="0"/>
+          <a:chExt cx="0" cy="0"/>
+        </a:xfrm>
+      </p:grpSpPr>
       <p:sp>
         <p:nvSpPr>
           <p:cNvPr id="2" name="Rectangle 1"/>
@@ -8465,6 +8629,7 @@
           <a:lstStyle/>
           <a:p>
             <a:pPr algn="ctr"/>
+            <a:endParaRPr/>
           </a:p>
         </p:txBody>
       </p:sp>
@@ -8549,7 +8714,7 @@
 </file>
 
 <file path=ppt/slides/slide30.xml><?xml version="1.0" encoding="utf-8"?>
-<p:sld xmlns:a="http://schemas.openxmlformats.org/drawingml/2006/main" xmlns:p="http://schemas.openxmlformats.org/presentationml/2006/main" xmlns:r="http://schemas.openxmlformats.org/officeDocument/2006/relationships">
+<p:sld xmlns:a="http://schemas.openxmlformats.org/drawingml/2006/main" xmlns:r="http://schemas.openxmlformats.org/officeDocument/2006/relationships" xmlns:p="http://schemas.openxmlformats.org/presentationml/2006/main">
   <p:cSld>
     <p:bg>
       <p:bgPr>
@@ -8565,7 +8730,14 @@
         <p:cNvGrpSpPr/>
         <p:nvPr/>
       </p:nvGrpSpPr>
-      <p:grpSpPr/>
+      <p:grpSpPr>
+        <a:xfrm>
+          <a:off x="0" y="0"/>
+          <a:ext cx="0" cy="0"/>
+          <a:chOff x="0" y="0"/>
+          <a:chExt cx="0" cy="0"/>
+        </a:xfrm>
+      </p:grpSpPr>
       <p:sp>
         <p:nvSpPr>
           <p:cNvPr id="2" name="TextBox 1"/>
@@ -8671,7 +8843,7 @@
 </file>
 
 <file path=ppt/slides/slide31.xml><?xml version="1.0" encoding="utf-8"?>
-<p:sld xmlns:a="http://schemas.openxmlformats.org/drawingml/2006/main" xmlns:p="http://schemas.openxmlformats.org/presentationml/2006/main" xmlns:r="http://schemas.openxmlformats.org/officeDocument/2006/relationships">
+<p:sld xmlns:a="http://schemas.openxmlformats.org/drawingml/2006/main" xmlns:r="http://schemas.openxmlformats.org/officeDocument/2006/relationships" xmlns:p="http://schemas.openxmlformats.org/presentationml/2006/main">
   <p:cSld>
     <p:bg>
       <p:bgPr>
@@ -8687,7 +8859,14 @@
         <p:cNvGrpSpPr/>
         <p:nvPr/>
       </p:nvGrpSpPr>
-      <p:grpSpPr/>
+      <p:grpSpPr>
+        <a:xfrm>
+          <a:off x="0" y="0"/>
+          <a:ext cx="0" cy="0"/>
+          <a:chOff x="0" y="0"/>
+          <a:chExt cx="0" cy="0"/>
+        </a:xfrm>
+      </p:grpSpPr>
       <p:sp>
         <p:nvSpPr>
           <p:cNvPr id="2" name="TextBox 1"/>
@@ -8853,7 +9032,7 @@
 </file>
 
 <file path=ppt/slides/slide32.xml><?xml version="1.0" encoding="utf-8"?>
-<p:sld xmlns:a="http://schemas.openxmlformats.org/drawingml/2006/main" xmlns:p="http://schemas.openxmlformats.org/presentationml/2006/main" xmlns:r="http://schemas.openxmlformats.org/officeDocument/2006/relationships">
+<p:sld xmlns:a="http://schemas.openxmlformats.org/drawingml/2006/main" xmlns:r="http://schemas.openxmlformats.org/officeDocument/2006/relationships" xmlns:p="http://schemas.openxmlformats.org/presentationml/2006/main">
   <p:cSld>
     <p:bg>
       <p:bgPr>
@@ -8869,7 +9048,14 @@
         <p:cNvGrpSpPr/>
         <p:nvPr/>
       </p:nvGrpSpPr>
-      <p:grpSpPr/>
+      <p:grpSpPr>
+        <a:xfrm>
+          <a:off x="0" y="0"/>
+          <a:ext cx="0" cy="0"/>
+          <a:chOff x="0" y="0"/>
+          <a:chExt cx="0" cy="0"/>
+        </a:xfrm>
+      </p:grpSpPr>
       <p:sp>
         <p:nvSpPr>
           <p:cNvPr id="2" name="Rectangle 1"/>
@@ -8910,6 +9096,7 @@
           <a:lstStyle/>
           <a:p>
             <a:pPr algn="ctr"/>
+            <a:endParaRPr/>
           </a:p>
         </p:txBody>
       </p:sp>
@@ -8994,7 +9181,7 @@
 </file>
 
 <file path=ppt/slides/slide33.xml><?xml version="1.0" encoding="utf-8"?>
-<p:sld xmlns:a="http://schemas.openxmlformats.org/drawingml/2006/main" xmlns:p="http://schemas.openxmlformats.org/presentationml/2006/main" xmlns:r="http://schemas.openxmlformats.org/officeDocument/2006/relationships">
+<p:sld xmlns:a="http://schemas.openxmlformats.org/drawingml/2006/main" xmlns:r="http://schemas.openxmlformats.org/officeDocument/2006/relationships" xmlns:p="http://schemas.openxmlformats.org/presentationml/2006/main">
   <p:cSld>
     <p:bg>
       <p:bgPr>
@@ -9010,7 +9197,14 @@
         <p:cNvGrpSpPr/>
         <p:nvPr/>
       </p:nvGrpSpPr>
-      <p:grpSpPr/>
+      <p:grpSpPr>
+        <a:xfrm>
+          <a:off x="0" y="0"/>
+          <a:ext cx="0" cy="0"/>
+          <a:chOff x="0" y="0"/>
+          <a:chExt cx="0" cy="0"/>
+        </a:xfrm>
+      </p:grpSpPr>
       <p:sp>
         <p:nvSpPr>
           <p:cNvPr id="2" name="TextBox 1"/>
@@ -9176,7 +9370,7 @@
 </file>
 
 <file path=ppt/slides/slide34.xml><?xml version="1.0" encoding="utf-8"?>
-<p:sld xmlns:a="http://schemas.openxmlformats.org/drawingml/2006/main" xmlns:p="http://schemas.openxmlformats.org/presentationml/2006/main" xmlns:r="http://schemas.openxmlformats.org/officeDocument/2006/relationships">
+<p:sld xmlns:a="http://schemas.openxmlformats.org/drawingml/2006/main" xmlns:r="http://schemas.openxmlformats.org/officeDocument/2006/relationships" xmlns:p="http://schemas.openxmlformats.org/presentationml/2006/main">
   <p:cSld>
     <p:bg>
       <p:bgPr>
@@ -9192,7 +9386,14 @@
         <p:cNvGrpSpPr/>
         <p:nvPr/>
       </p:nvGrpSpPr>
-      <p:grpSpPr/>
+      <p:grpSpPr>
+        <a:xfrm>
+          <a:off x="0" y="0"/>
+          <a:ext cx="0" cy="0"/>
+          <a:chOff x="0" y="0"/>
+          <a:chExt cx="0" cy="0"/>
+        </a:xfrm>
+      </p:grpSpPr>
       <p:sp>
         <p:nvSpPr>
           <p:cNvPr id="2" name="TextBox 1"/>
@@ -9358,7 +9559,7 @@
 </file>
 
 <file path=ppt/slides/slide35.xml><?xml version="1.0" encoding="utf-8"?>
-<p:sld xmlns:a="http://schemas.openxmlformats.org/drawingml/2006/main" xmlns:p="http://schemas.openxmlformats.org/presentationml/2006/main" xmlns:r="http://schemas.openxmlformats.org/officeDocument/2006/relationships">
+<p:sld xmlns:a="http://schemas.openxmlformats.org/drawingml/2006/main" xmlns:r="http://schemas.openxmlformats.org/officeDocument/2006/relationships" xmlns:p="http://schemas.openxmlformats.org/presentationml/2006/main">
   <p:cSld>
     <p:bg>
       <p:bgPr>
@@ -9374,7 +9575,14 @@
         <p:cNvGrpSpPr/>
         <p:nvPr/>
       </p:nvGrpSpPr>
-      <p:grpSpPr/>
+      <p:grpSpPr>
+        <a:xfrm>
+          <a:off x="0" y="0"/>
+          <a:ext cx="0" cy="0"/>
+          <a:chOff x="0" y="0"/>
+          <a:chExt cx="0" cy="0"/>
+        </a:xfrm>
+      </p:grpSpPr>
       <p:sp>
         <p:nvSpPr>
           <p:cNvPr id="2" name="TextBox 1"/>
@@ -9552,7 +9760,7 @@
 </file>
 
 <file path=ppt/slides/slide36.xml><?xml version="1.0" encoding="utf-8"?>
-<p:sld xmlns:a="http://schemas.openxmlformats.org/drawingml/2006/main" xmlns:p="http://schemas.openxmlformats.org/presentationml/2006/main" xmlns:r="http://schemas.openxmlformats.org/officeDocument/2006/relationships">
+<p:sld xmlns:a="http://schemas.openxmlformats.org/drawingml/2006/main" xmlns:r="http://schemas.openxmlformats.org/officeDocument/2006/relationships" xmlns:p="http://schemas.openxmlformats.org/presentationml/2006/main">
   <p:cSld>
     <p:bg>
       <p:bgPr>
@@ -9568,7 +9776,14 @@
         <p:cNvGrpSpPr/>
         <p:nvPr/>
       </p:nvGrpSpPr>
-      <p:grpSpPr/>
+      <p:grpSpPr>
+        <a:xfrm>
+          <a:off x="0" y="0"/>
+          <a:ext cx="0" cy="0"/>
+          <a:chOff x="0" y="0"/>
+          <a:chExt cx="0" cy="0"/>
+        </a:xfrm>
+      </p:grpSpPr>
       <p:sp>
         <p:nvSpPr>
           <p:cNvPr id="2" name="Rectangle 1"/>
@@ -9609,6 +9824,7 @@
           <a:lstStyle/>
           <a:p>
             <a:pPr algn="ctr"/>
+            <a:endParaRPr/>
           </a:p>
         </p:txBody>
       </p:sp>
@@ -9693,7 +9909,7 @@
 </file>
 
 <file path=ppt/slides/slide37.xml><?xml version="1.0" encoding="utf-8"?>
-<p:sld xmlns:a="http://schemas.openxmlformats.org/drawingml/2006/main" xmlns:p="http://schemas.openxmlformats.org/presentationml/2006/main" xmlns:r="http://schemas.openxmlformats.org/officeDocument/2006/relationships">
+<p:sld xmlns:a="http://schemas.openxmlformats.org/drawingml/2006/main" xmlns:r="http://schemas.openxmlformats.org/officeDocument/2006/relationships" xmlns:p="http://schemas.openxmlformats.org/presentationml/2006/main">
   <p:cSld>
     <p:bg>
       <p:bgPr>
@@ -9709,7 +9925,14 @@
         <p:cNvGrpSpPr/>
         <p:nvPr/>
       </p:nvGrpSpPr>
-      <p:grpSpPr/>
+      <p:grpSpPr>
+        <a:xfrm>
+          <a:off x="0" y="0"/>
+          <a:ext cx="0" cy="0"/>
+          <a:chOff x="0" y="0"/>
+          <a:chExt cx="0" cy="0"/>
+        </a:xfrm>
+      </p:grpSpPr>
       <p:sp>
         <p:nvSpPr>
           <p:cNvPr id="2" name="TextBox 1"/>
@@ -9786,6 +10009,7 @@
           <a:lstStyle/>
           <a:p>
             <a:pPr algn="ctr"/>
+            <a:endParaRPr/>
           </a:p>
         </p:txBody>
       </p:sp>
@@ -9949,6 +10173,7 @@
           <a:lstStyle/>
           <a:p>
             <a:pPr algn="ctr"/>
+            <a:endParaRPr/>
           </a:p>
         </p:txBody>
       </p:sp>
@@ -10112,6 +10337,7 @@
           <a:lstStyle/>
           <a:p>
             <a:pPr algn="ctr"/>
+            <a:endParaRPr/>
           </a:p>
         </p:txBody>
       </p:sp>
@@ -10311,6 +10537,7 @@
           <a:lstStyle/>
           <a:p>
             <a:pPr algn="ctr"/>
+            <a:endParaRPr/>
           </a:p>
         </p:txBody>
       </p:sp>
@@ -10439,7 +10666,7 @@
 </file>
 
 <file path=ppt/slides/slide38.xml><?xml version="1.0" encoding="utf-8"?>
-<p:sld xmlns:a="http://schemas.openxmlformats.org/drawingml/2006/main" xmlns:p="http://schemas.openxmlformats.org/presentationml/2006/main" xmlns:r="http://schemas.openxmlformats.org/officeDocument/2006/relationships">
+<p:sld xmlns:a="http://schemas.openxmlformats.org/drawingml/2006/main" xmlns:r="http://schemas.openxmlformats.org/officeDocument/2006/relationships" xmlns:p="http://schemas.openxmlformats.org/presentationml/2006/main">
   <p:cSld>
     <p:bg>
       <p:bgPr>
@@ -10455,7 +10682,14 @@
         <p:cNvGrpSpPr/>
         <p:nvPr/>
       </p:nvGrpSpPr>
-      <p:grpSpPr/>
+      <p:grpSpPr>
+        <a:xfrm>
+          <a:off x="0" y="0"/>
+          <a:ext cx="0" cy="0"/>
+          <a:chOff x="0" y="0"/>
+          <a:chExt cx="0" cy="0"/>
+        </a:xfrm>
+      </p:grpSpPr>
       <p:sp>
         <p:nvSpPr>
           <p:cNvPr id="2" name="TextBox 1"/>
@@ -10994,6 +11228,7 @@
                 <a:latin typeface="Segoe UI"/>
               </a:defRPr>
             </a:pPr>
+            <a:endParaRPr/>
           </a:p>
           <a:p>
             <a:pPr>
@@ -11166,7 +11401,7 @@
 </file>
 
 <file path=ppt/slides/slide39.xml><?xml version="1.0" encoding="utf-8"?>
-<p:sld xmlns:a="http://schemas.openxmlformats.org/drawingml/2006/main" xmlns:p="http://schemas.openxmlformats.org/presentationml/2006/main" xmlns:r="http://schemas.openxmlformats.org/officeDocument/2006/relationships">
+<p:sld xmlns:a="http://schemas.openxmlformats.org/drawingml/2006/main" xmlns:r="http://schemas.openxmlformats.org/officeDocument/2006/relationships" xmlns:p="http://schemas.openxmlformats.org/presentationml/2006/main">
   <p:cSld>
     <p:bg>
       <p:bgPr>
@@ -11182,7 +11417,14 @@
         <p:cNvGrpSpPr/>
         <p:nvPr/>
       </p:nvGrpSpPr>
-      <p:grpSpPr/>
+      <p:grpSpPr>
+        <a:xfrm>
+          <a:off x="0" y="0"/>
+          <a:ext cx="0" cy="0"/>
+          <a:chOff x="0" y="0"/>
+          <a:chExt cx="0" cy="0"/>
+        </a:xfrm>
+      </p:grpSpPr>
       <p:sp>
         <p:nvSpPr>
           <p:cNvPr id="2" name="Rounded Rectangle 1"/>
@@ -11368,7 +11610,7 @@
 </file>
 
 <file path=ppt/slides/slide4.xml><?xml version="1.0" encoding="utf-8"?>
-<p:sld xmlns:a="http://schemas.openxmlformats.org/drawingml/2006/main" xmlns:p="http://schemas.openxmlformats.org/presentationml/2006/main" xmlns:r="http://schemas.openxmlformats.org/officeDocument/2006/relationships">
+<p:sld xmlns:a="http://schemas.openxmlformats.org/drawingml/2006/main" xmlns:r="http://schemas.openxmlformats.org/officeDocument/2006/relationships" xmlns:p="http://schemas.openxmlformats.org/presentationml/2006/main">
   <p:cSld>
     <p:bg>
       <p:bgPr>
@@ -11384,7 +11626,14 @@
         <p:cNvGrpSpPr/>
         <p:nvPr/>
       </p:nvGrpSpPr>
-      <p:grpSpPr/>
+      <p:grpSpPr>
+        <a:xfrm>
+          <a:off x="0" y="0"/>
+          <a:ext cx="0" cy="0"/>
+          <a:chOff x="0" y="0"/>
+          <a:chExt cx="0" cy="0"/>
+        </a:xfrm>
+      </p:grpSpPr>
       <p:sp>
         <p:nvSpPr>
           <p:cNvPr id="2" name="TextBox 1"/>
@@ -11437,8 +11686,8 @@
         </p:blipFill>
         <p:spPr>
           <a:xfrm>
-            <a:off x="731520" y="1005840"/>
-            <a:ext cx="10698480" cy="6686550"/>
+            <a:off x="1852053" y="959413"/>
+            <a:ext cx="8487894" cy="5304934"/>
           </a:xfrm>
           <a:prstGeom prst="rect">
             <a:avLst/>
@@ -11490,7 +11739,7 @@
 </file>
 
 <file path=ppt/slides/slide5.xml><?xml version="1.0" encoding="utf-8"?>
-<p:sld xmlns:a="http://schemas.openxmlformats.org/drawingml/2006/main" xmlns:p="http://schemas.openxmlformats.org/presentationml/2006/main" xmlns:r="http://schemas.openxmlformats.org/officeDocument/2006/relationships">
+<p:sld xmlns:a="http://schemas.openxmlformats.org/drawingml/2006/main" xmlns:r="http://schemas.openxmlformats.org/officeDocument/2006/relationships" xmlns:p="http://schemas.openxmlformats.org/presentationml/2006/main">
   <p:cSld>
     <p:bg>
       <p:bgPr>
@@ -11506,7 +11755,14 @@
         <p:cNvGrpSpPr/>
         <p:nvPr/>
       </p:nvGrpSpPr>
-      <p:grpSpPr/>
+      <p:grpSpPr>
+        <a:xfrm>
+          <a:off x="0" y="0"/>
+          <a:ext cx="0" cy="0"/>
+          <a:chOff x="0" y="0"/>
+          <a:chExt cx="0" cy="0"/>
+        </a:xfrm>
+      </p:grpSpPr>
       <p:sp>
         <p:nvSpPr>
           <p:cNvPr id="2" name="TextBox 1"/>
@@ -11672,7 +11928,7 @@
 </file>
 
 <file path=ppt/slides/slide6.xml><?xml version="1.0" encoding="utf-8"?>
-<p:sld xmlns:a="http://schemas.openxmlformats.org/drawingml/2006/main" xmlns:p="http://schemas.openxmlformats.org/presentationml/2006/main" xmlns:r="http://schemas.openxmlformats.org/officeDocument/2006/relationships">
+<p:sld xmlns:a="http://schemas.openxmlformats.org/drawingml/2006/main" xmlns:r="http://schemas.openxmlformats.org/officeDocument/2006/relationships" xmlns:p="http://schemas.openxmlformats.org/presentationml/2006/main">
   <p:cSld>
     <p:bg>
       <p:bgPr>
@@ -11688,7 +11944,14 @@
         <p:cNvGrpSpPr/>
         <p:nvPr/>
       </p:nvGrpSpPr>
-      <p:grpSpPr/>
+      <p:grpSpPr>
+        <a:xfrm>
+          <a:off x="0" y="0"/>
+          <a:ext cx="0" cy="0"/>
+          <a:chOff x="0" y="0"/>
+          <a:chExt cx="0" cy="0"/>
+        </a:xfrm>
+      </p:grpSpPr>
       <p:sp>
         <p:nvSpPr>
           <p:cNvPr id="2" name="TextBox 1"/>
@@ -11854,7 +12117,7 @@
 </file>
 
 <file path=ppt/slides/slide7.xml><?xml version="1.0" encoding="utf-8"?>
-<p:sld xmlns:a="http://schemas.openxmlformats.org/drawingml/2006/main" xmlns:p="http://schemas.openxmlformats.org/presentationml/2006/main" xmlns:r="http://schemas.openxmlformats.org/officeDocument/2006/relationships">
+<p:sld xmlns:a="http://schemas.openxmlformats.org/drawingml/2006/main" xmlns:r="http://schemas.openxmlformats.org/officeDocument/2006/relationships" xmlns:p="http://schemas.openxmlformats.org/presentationml/2006/main">
   <p:cSld>
     <p:bg>
       <p:bgPr>
@@ -11870,7 +12133,14 @@
         <p:cNvGrpSpPr/>
         <p:nvPr/>
       </p:nvGrpSpPr>
-      <p:grpSpPr/>
+      <p:grpSpPr>
+        <a:xfrm>
+          <a:off x="0" y="0"/>
+          <a:ext cx="0" cy="0"/>
+          <a:chOff x="0" y="0"/>
+          <a:chExt cx="0" cy="0"/>
+        </a:xfrm>
+      </p:grpSpPr>
       <p:sp>
         <p:nvSpPr>
           <p:cNvPr id="2" name="TextBox 1"/>
@@ -12036,7 +12306,7 @@
 </file>
 
 <file path=ppt/slides/slide8.xml><?xml version="1.0" encoding="utf-8"?>
-<p:sld xmlns:a="http://schemas.openxmlformats.org/drawingml/2006/main" xmlns:p="http://schemas.openxmlformats.org/presentationml/2006/main" xmlns:r="http://schemas.openxmlformats.org/officeDocument/2006/relationships">
+<p:sld xmlns:a="http://schemas.openxmlformats.org/drawingml/2006/main" xmlns:r="http://schemas.openxmlformats.org/officeDocument/2006/relationships" xmlns:p="http://schemas.openxmlformats.org/presentationml/2006/main">
   <p:cSld>
     <p:bg>
       <p:bgPr>
@@ -12052,7 +12322,14 @@
         <p:cNvGrpSpPr/>
         <p:nvPr/>
       </p:nvGrpSpPr>
-      <p:grpSpPr/>
+      <p:grpSpPr>
+        <a:xfrm>
+          <a:off x="0" y="0"/>
+          <a:ext cx="0" cy="0"/>
+          <a:chOff x="0" y="0"/>
+          <a:chExt cx="0" cy="0"/>
+        </a:xfrm>
+      </p:grpSpPr>
       <p:sp>
         <p:nvSpPr>
           <p:cNvPr id="2" name="TextBox 1"/>
@@ -12218,7 +12495,7 @@
 </file>
 
 <file path=ppt/slides/slide9.xml><?xml version="1.0" encoding="utf-8"?>
-<p:sld xmlns:a="http://schemas.openxmlformats.org/drawingml/2006/main" xmlns:p="http://schemas.openxmlformats.org/presentationml/2006/main" xmlns:r="http://schemas.openxmlformats.org/officeDocument/2006/relationships">
+<p:sld xmlns:a="http://schemas.openxmlformats.org/drawingml/2006/main" xmlns:r="http://schemas.openxmlformats.org/officeDocument/2006/relationships" xmlns:p="http://schemas.openxmlformats.org/presentationml/2006/main">
   <p:cSld>
     <p:bg>
       <p:bgPr>
@@ -12234,7 +12511,14 @@
         <p:cNvGrpSpPr/>
         <p:nvPr/>
       </p:nvGrpSpPr>
-      <p:grpSpPr/>
+      <p:grpSpPr>
+        <a:xfrm>
+          <a:off x="0" y="0"/>
+          <a:ext cx="0" cy="0"/>
+          <a:chOff x="0" y="0"/>
+          <a:chExt cx="0" cy="0"/>
+        </a:xfrm>
+      </p:grpSpPr>
       <p:sp>
         <p:nvSpPr>
           <p:cNvPr id="2" name="TextBox 1"/>
